--- a/lessons-v2/day16/day16.pptx
+++ b/lessons-v2/day16/day16.pptx
@@ -23,9 +23,10 @@
     <p:sldId id="271" r:id="rId17"/>
     <p:sldId id="272" r:id="rId18"/>
     <p:sldId id="273" r:id="rId19"/>
+    <p:sldId id="274" r:id="rId20"/>
   </p:sldIdLst>
   <p:notesMasterIdLst>
-    <p:notesMasterId r:id="rId20"/>
+    <p:notesMasterId r:id="rId21"/>
   </p:notesMasterIdLst>
   <p:sldSz cx="12192000" cy="6858000"/>
   <p:notesSz cx="6858000" cy="12192000"/>
@@ -531,13 +532,15 @@
 01:06 #4 &amp; #5 — broken auth/session, SSRF                      5
 01:11 Attack &lt;-&gt; defence — the one pattern                     4
 01:15 Trap + wrap + homework                                   5
-CUT FIRST IF SHORT: the SSRF half of #4-5; the Burp demo to 2 min; DOM XSS detail.
+CUT FIRST IF SHORT: step 4 (sqlmap) of the SQLi DO — narrate/demo it yourself in 60s instead of
+having everyone run it; the SSRF half of #4-5; the Burp demo to 2 min; DOM XSS detail.
 NEVER CUT: the injection mechanism + the SQLi DO, XSS + the stored-XSS DO, IDOR, the
 "parameterize don't filter" trap, the find/prove/fix artifact.
 ANALOGY (kitchen): untrusted input = an order ticket. If the kitchen blindly does whatever the
 ticket says ("table 4: two pastas AND unlock the safe"), that's injection. A parameterized
 query = an order form with fixed fields — the customer fills VALUES, never instructions.
-ETHICS: DVWA / Juice Shop on &lt;LAB_HOST&gt; only (the ROE). These apps are built to be attacked.</a:t>
+ETHICS: DVWA / Juice Shop on &lt;LAB_HOST&gt; only (the ROE). These apps are built to be attacked.
+Own lab: DVWA `10.89.1.20`, Juice Shop `10.89.1.30` — see the Day 13 teacher-notes lab tool map.</a:t>
             </a:r>
             <a:endParaRPr lang="en-US" dirty="0"/>
           </a:p>
@@ -984,8 +987,11 @@
           <a:p>
             <a:r>
               <a:rPr lang="en-US" dirty="0"/>
-              <a:t>Show a WAF/app log line for a blocked SQLi attempt next to the one-line code fix. The WAF buys
-time; it doesn't remove the bug. Devs who "rely on the WAF" ship the vuln.</a:t>
+              <a:t>OPTIONAL slide — cut first if short, or assign as homework reading. Same "your data became
+code" pattern as the SQLi slide; students should recognise it immediately.
+DVWA (`10.89.1.20`) has a Command Injection page and a CSRF page — good for extra practice
+beyond today's three DOs. Command Injection there is also the door Day 17 walks through: a
+shell via a web bug, then a backdoor for persistence — same target, later stage.</a:t>
             </a:r>
             <a:endParaRPr lang="en-US" dirty="0"/>
           </a:p>
@@ -1028,6 +1034,95 @@
 </file>
 
 <file path=ppt/notesSlides/notesSlide15.xml><?xml version="1.0" encoding="utf-8"?>
+<p:notes xmlns:a="http://schemas.openxmlformats.org/drawingml/2006/main" xmlns:r="http://schemas.openxmlformats.org/officeDocument/2006/relationships" xmlns:p="http://schemas.openxmlformats.org/presentationml/2006/main">
+  <p:cSld>
+    <p:spTree>
+      <p:nvGrpSpPr>
+        <p:cNvPr id="1" name=""/>
+        <p:cNvGrpSpPr/>
+        <p:nvPr/>
+      </p:nvGrpSpPr>
+      <p:grpSpPr>
+        <a:xfrm>
+          <a:off x="0" y="0"/>
+          <a:ext cx="0" cy="0"/>
+          <a:chOff x="0" y="0"/>
+          <a:chExt cx="0" cy="0"/>
+        </a:xfrm>
+      </p:grpSpPr>
+      <p:sp>
+        <p:nvSpPr>
+          <p:cNvPr id="2" name="Slide Image Placeholder 1"/>
+          <p:cNvSpPr>
+            <a:spLocks noGrp="1" noRot="1" noChangeAspect="1"/>
+          </p:cNvSpPr>
+          <p:nvPr>
+            <p:ph type="sldImg"/>
+          </p:nvPr>
+        </p:nvSpPr>
+        <p:spPr/>
+      </p:sp>
+      <p:sp>
+        <p:nvSpPr>
+          <p:cNvPr id="3" name="Notes Placeholder 2"/>
+          <p:cNvSpPr>
+            <a:spLocks noGrp="1"/>
+          </p:cNvSpPr>
+          <p:nvPr>
+            <p:ph type="body" idx="1"/>
+          </p:nvPr>
+        </p:nvSpPr>
+        <p:spPr/>
+        <p:txBody>
+          <a:bodyPr/>
+          <a:lstStyle/>
+          <a:p>
+            <a:r>
+              <a:rPr lang="en-US" dirty="0"/>
+              <a:t>Show a WAF/app log line for a blocked SQLi attempt next to the one-line code fix. The WAF buys
+time; it doesn't remove the bug. Devs who "rely on the WAF" ship the vuln.</a:t>
+            </a:r>
+            <a:endParaRPr lang="en-US" dirty="0"/>
+          </a:p>
+        </p:txBody>
+      </p:sp>
+      <p:sp>
+        <p:nvSpPr>
+          <p:cNvPr id="4" name="Slide Number Placeholder 3"/>
+          <p:cNvSpPr>
+            <a:spLocks noGrp="1"/>
+          </p:cNvSpPr>
+          <p:nvPr>
+            <p:ph type="sldNum" sz="quarter" idx="10"/>
+          </p:nvPr>
+        </p:nvSpPr>
+        <p:spPr/>
+        <p:txBody>
+          <a:bodyPr/>
+          <a:lstStyle/>
+          <a:p>
+            <a:fld id="{F7021451-1387-4CA6-816F-3879F97B5CBC}" type="slidenum">
+              <a:rPr lang="en-US"/>
+              <a:t>15</a:t>
+            </a:fld>
+            <a:endParaRPr lang="en-US"/>
+          </a:p>
+        </p:txBody>
+      </p:sp>
+    </p:spTree>
+    <p:extLst>
+      <p:ext uri="{BB962C8B-B14F-4D97-AF65-F5344CB8AC3E}">
+        <p14:creationId xmlns:p14="http://schemas.microsoft.com/office/powerpoint/2010/main" val="1024086991"/>
+      </p:ext>
+    </p:extLst>
+  </p:cSld>
+  <p:clrMapOvr>
+    <a:masterClrMapping/>
+  </p:clrMapOvr>
+</p:notes>
+</file>
+
+<file path=ppt/notesSlides/notesSlide16.xml><?xml version="1.0" encoding="utf-8"?>
 <p:notes xmlns:a="http://schemas.openxmlformats.org/drawingml/2006/main" xmlns:r="http://schemas.openxmlformats.org/officeDocument/2006/relationships" xmlns:p="http://schemas.openxmlformats.org/presentationml/2006/main">
   <p:cSld>
     <p:spTree>
@@ -1097,7 +1192,7 @@
           <a:p>
             <a:fld id="{F7021451-1387-4CA6-816F-3879F97B5CBC}" type="slidenum">
               <a:rPr lang="en-US"/>
-              <a:t>15</a:t>
+              <a:t>16</a:t>
             </a:fld>
             <a:endParaRPr lang="en-US"/>
           </a:p>
@@ -1116,7 +1211,7 @@
 </p:notes>
 </file>
 
-<file path=ppt/notesSlides/notesSlide16.xml><?xml version="1.0" encoding="utf-8"?>
+<file path=ppt/notesSlides/notesSlide17.xml><?xml version="1.0" encoding="utf-8"?>
 <p:notes xmlns:a="http://schemas.openxmlformats.org/drawingml/2006/main" xmlns:r="http://schemas.openxmlformats.org/officeDocument/2006/relationships" xmlns:p="http://schemas.openxmlformats.org/presentationml/2006/main">
   <p:cSld>
     <p:spTree>
@@ -1185,7 +1280,7 @@
           <a:p>
             <a:fld id="{F7021451-1387-4CA6-816F-3879F97B5CBC}" type="slidenum">
               <a:rPr lang="en-US"/>
-              <a:t>16</a:t>
+              <a:t>17</a:t>
             </a:fld>
             <a:endParaRPr lang="en-US"/>
           </a:p>
@@ -1204,7 +1299,7 @@
 </p:notes>
 </file>
 
-<file path=ppt/notesSlides/notesSlide17.xml><?xml version="1.0" encoding="utf-8"?>
+<file path=ppt/notesSlides/notesSlide18.xml><?xml version="1.0" encoding="utf-8"?>
 <p:notes xmlns:a="http://schemas.openxmlformats.org/drawingml/2006/main" xmlns:r="http://schemas.openxmlformats.org/officeDocument/2006/relationships" xmlns:p="http://schemas.openxmlformats.org/presentationml/2006/main">
   <p:cSld>
     <p:spTree>
@@ -1273,7 +1368,7 @@
           <a:p>
             <a:fld id="{F7021451-1387-4CA6-816F-3879F97B5CBC}" type="slidenum">
               <a:rPr lang="en-US"/>
-              <a:t>17</a:t>
+              <a:t>18</a:t>
             </a:fld>
             <a:endParaRPr lang="en-US"/>
           </a:p>
@@ -1292,7 +1387,7 @@
 </p:notes>
 </file>
 
-<file path=ppt/notesSlides/notesSlide18.xml><?xml version="1.0" encoding="utf-8"?>
+<file path=ppt/notesSlides/notesSlide19.xml><?xml version="1.0" encoding="utf-8"?>
 <p:notes xmlns:a="http://schemas.openxmlformats.org/drawingml/2006/main" xmlns:r="http://schemas.openxmlformats.org/officeDocument/2006/relationships" xmlns:p="http://schemas.openxmlformats.org/presentationml/2006/main">
   <p:cSld>
     <p:spTree>
@@ -1362,7 +1457,7 @@
           <a:p>
             <a:fld id="{F7021451-1387-4CA6-816F-3879F97B5CBC}" type="slidenum">
               <a:rPr lang="en-US"/>
-              <a:t>18</a:t>
+              <a:t>19</a:t>
             </a:fld>
             <a:endParaRPr lang="en-US"/>
           </a:p>
@@ -2763,6 +2858,45 @@
 <file path=ppt/slides/slide18.xml><?xml version="1.0" encoding="utf-8"?>
 <p:sld xmlns:a="http://schemas.openxmlformats.org/drawingml/2006/main" xmlns:r="http://schemas.openxmlformats.org/officeDocument/2006/relationships" xmlns:p="http://schemas.openxmlformats.org/presentationml/2006/main">
   <p:cSld name="Slide 18">
+    <p:bg>
+      <p:bgPr>
+        <a:blipFill dpi="0" rotWithShape="1">
+          <a:blip r:embed="rId1">
+            <a:lum/>
+          </a:blip>
+          <a:srcRect/>
+          <a:stretch>
+            <a:fillRect/>
+          </a:stretch>
+        </a:blipFill>
+        <a:effectLst/>
+      </p:bgPr>
+    </p:bg>
+    <p:spTree>
+      <p:nvGrpSpPr>
+        <p:cNvPr id="1" name=""/>
+        <p:cNvGrpSpPr/>
+        <p:nvPr/>
+      </p:nvGrpSpPr>
+      <p:grpSpPr>
+        <a:xfrm>
+          <a:off x="0" y="0"/>
+          <a:ext cx="0" cy="0"/>
+          <a:chOff x="0" y="0"/>
+          <a:chExt cx="0" cy="0"/>
+        </a:xfrm>
+      </p:grpSpPr>
+    </p:spTree>
+  </p:cSld>
+  <p:clrMapOvr>
+    <a:masterClrMapping/>
+  </p:clrMapOvr>
+</p:sld>
+</file>
+
+<file path=ppt/slides/slide19.xml><?xml version="1.0" encoding="utf-8"?>
+<p:sld xmlns:a="http://schemas.openxmlformats.org/drawingml/2006/main" xmlns:r="http://schemas.openxmlformats.org/officeDocument/2006/relationships" xmlns:p="http://schemas.openxmlformats.org/presentationml/2006/main">
+  <p:cSld name="Slide 19">
     <p:bg>
       <p:bgPr>
         <a:blipFill dpi="0" rotWithShape="1">
